--- a/neerlandais1/powerpoints/Module_14_Woordvorming.pptx
+++ b/neerlandais1/powerpoints/Module_14_Woordvorming.pptx
@@ -133,19 +133,19 @@
   <p:extLst>
     <p:ext uri="{521415D9-36F7-43E2-AB2F-B90AF26B5E84}">
       <p14:sectionLst xmlns:p14="http://schemas.microsoft.com/office/powerpoint/2010/main">
-        <p14:section name="Ouverture" id="{503212be-f25e-69ca-bd2a-6516806f4226}">
+        <p14:section name="Ouverture" id="{e429185e-d83e-1748-e0c9-5309057267ab}">
           <p14:sldIdLst>
             <p14:sldId id="256"/>
           </p14:sldIdLst>
         </p14:section>
-        <p14:section name="Découvrir" id="{7b287669-0a2f-0573-f35d-2bab7de91630}">
+        <p14:section name="Découvrir" id="{1cef9653-856b-c10b-42ad-0c849bc61efd}">
           <p14:sldIdLst>
             <p14:sldId id="257"/>
             <p14:sldId id="258"/>
             <p14:sldId id="259"/>
           </p14:sldIdLst>
         </p14:section>
-        <p14:section name="Comprendre" id="{fddc8a0d-5506-6674-f93f-a3e12079ae46}">
+        <p14:section name="Comprendre" id="{99f69771-6f47-01af-e285-afdb64e75354}">
           <p14:sldIdLst>
             <p14:sldId id="260"/>
             <p14:sldId id="261"/>
@@ -159,7 +159,7 @@
             <p14:sldId id="269"/>
           </p14:sldIdLst>
         </p14:section>
-        <p14:section name="JIJ NU ! — Oefeningen" id="{cec9c455-1758-ea38-10f6-961d8dcf9b95}">
+        <p14:section name="JIJ NU ! — Oefeningen" id="{3f746f68-316b-53a6-5bbc-f8e46ed2d10b}">
           <p14:sldIdLst>
             <p14:sldId id="270"/>
             <p14:sldId id="271"/>
@@ -175,7 +175,7 @@
             <p14:sldId id="281"/>
           </p14:sldIdLst>
         </p14:section>
-        <p14:section name="Clôture" id="{e7f8b9c0-92fd-1ea7-f742-758d7ab13c8e}">
+        <p14:section name="Clôture" id="{bf4f4c72-97a1-7de5-5e3f-7c0e2b16bcd9}">
           <p14:sldIdLst>
             <p14:sldId id="282"/>
           </p14:sldIdLst>
@@ -3806,7 +3806,7 @@
                   <a:srgbClr val="FFFFFF"/>
                 </a:solidFill>
               </a:rPr>
-              <a:t>MODULE 14 / 15</a:t>
+              <a:t>MODULE 14 / 19</a:t>
             </a:r>
             <a:endParaRPr lang="en-US" sz="1400" dirty="0"/>
           </a:p>

--- a/neerlandais1/powerpoints/Module_14_Woordvorming.pptx
+++ b/neerlandais1/powerpoints/Module_14_Woordvorming.pptx
@@ -133,19 +133,19 @@
   <p:extLst>
     <p:ext uri="{521415D9-36F7-43E2-AB2F-B90AF26B5E84}">
       <p14:sectionLst xmlns:p14="http://schemas.microsoft.com/office/powerpoint/2010/main">
-        <p14:section name="Ouverture" id="{e429185e-d83e-1748-e0c9-5309057267ab}">
+        <p14:section name="Ouverture" id="{fe0eee55-17f1-87df-e4f2-90d5ab8d7dbc}">
           <p14:sldIdLst>
             <p14:sldId id="256"/>
           </p14:sldIdLst>
         </p14:section>
-        <p14:section name="Découvrir" id="{1cef9653-856b-c10b-42ad-0c849bc61efd}">
+        <p14:section name="Découvrir" id="{21ff6211-8e14-7a26-709c-b42e8b589649}">
           <p14:sldIdLst>
             <p14:sldId id="257"/>
             <p14:sldId id="258"/>
             <p14:sldId id="259"/>
           </p14:sldIdLst>
         </p14:section>
-        <p14:section name="Comprendre" id="{99f69771-6f47-01af-e285-afdb64e75354}">
+        <p14:section name="Comprendre" id="{a4ac8cec-4540-5fd9-3891-55726546b1f4}">
           <p14:sldIdLst>
             <p14:sldId id="260"/>
             <p14:sldId id="261"/>
@@ -159,7 +159,7 @@
             <p14:sldId id="269"/>
           </p14:sldIdLst>
         </p14:section>
-        <p14:section name="JIJ NU ! — Oefeningen" id="{3f746f68-316b-53a6-5bbc-f8e46ed2d10b}">
+        <p14:section name="JIJ NU ! — Oefeningen" id="{903b03cd-31b6-6e90-3b60-b4766e09207b}">
           <p14:sldIdLst>
             <p14:sldId id="270"/>
             <p14:sldId id="271"/>
@@ -175,7 +175,7 @@
             <p14:sldId id="281"/>
           </p14:sldIdLst>
         </p14:section>
-        <p14:section name="Clôture" id="{bf4f4c72-97a1-7de5-5e3f-7c0e2b16bcd9}">
+        <p14:section name="Clôture" id="{a8504d64-b453-7fef-0fda-1b91b5faa936}">
           <p14:sldIdLst>
             <p14:sldId id="282"/>
           </p14:sldIdLst>
@@ -3806,7 +3806,7 @@
                   <a:srgbClr val="FFFFFF"/>
                 </a:solidFill>
               </a:rPr>
-              <a:t>MODULE 14 / 19</a:t>
+              <a:t>MODULE 14 / 24</a:t>
             </a:r>
             <a:endParaRPr lang="en-US" sz="1400" dirty="0"/>
           </a:p>

--- a/neerlandais1/powerpoints/Module_14_Woordvorming.pptx
+++ b/neerlandais1/powerpoints/Module_14_Woordvorming.pptx
@@ -133,19 +133,19 @@
   <p:extLst>
     <p:ext uri="{521415D9-36F7-43E2-AB2F-B90AF26B5E84}">
       <p14:sectionLst xmlns:p14="http://schemas.microsoft.com/office/powerpoint/2010/main">
-        <p14:section name="Ouverture" id="{fe0eee55-17f1-87df-e4f2-90d5ab8d7dbc}">
+        <p14:section name="Ouverture" id="{9aea3e4d-c05f-d533-1b26-fe7abc4507ce}">
           <p14:sldIdLst>
             <p14:sldId id="256"/>
           </p14:sldIdLst>
         </p14:section>
-        <p14:section name="Découvrir" id="{21ff6211-8e14-7a26-709c-b42e8b589649}">
+        <p14:section name="Découvrir" id="{79aceecd-a21c-49e1-25d7-2ce9cb541c9e}">
           <p14:sldIdLst>
             <p14:sldId id="257"/>
             <p14:sldId id="258"/>
             <p14:sldId id="259"/>
           </p14:sldIdLst>
         </p14:section>
-        <p14:section name="Comprendre" id="{a4ac8cec-4540-5fd9-3891-55726546b1f4}">
+        <p14:section name="Comprendre" id="{e5113a3e-94c8-d718-c544-12ea324c4ad2}">
           <p14:sldIdLst>
             <p14:sldId id="260"/>
             <p14:sldId id="261"/>
@@ -159,7 +159,7 @@
             <p14:sldId id="269"/>
           </p14:sldIdLst>
         </p14:section>
-        <p14:section name="JIJ NU ! — Oefeningen" id="{903b03cd-31b6-6e90-3b60-b4766e09207b}">
+        <p14:section name="JIJ NU ! — Oefeningen" id="{54c8f46b-8c2f-df49-fff6-bf64d66ef007}">
           <p14:sldIdLst>
             <p14:sldId id="270"/>
             <p14:sldId id="271"/>
@@ -175,7 +175,7 @@
             <p14:sldId id="281"/>
           </p14:sldIdLst>
         </p14:section>
-        <p14:section name="Clôture" id="{a8504d64-b453-7fef-0fda-1b91b5faa936}">
+        <p14:section name="Clôture" id="{28e4a441-8680-0804-b9b4-f55cac24fe68}">
           <p14:sldIdLst>
             <p14:sldId id="282"/>
           </p14:sldIdLst>
@@ -3806,7 +3806,7 @@
                   <a:srgbClr val="FFFFFF"/>
                 </a:solidFill>
               </a:rPr>
-              <a:t>MODULE 14 / 24</a:t>
+              <a:t>MODULE 14 / 29</a:t>
             </a:r>
             <a:endParaRPr lang="en-US" sz="1400" dirty="0"/>
           </a:p>

--- a/neerlandais1/powerpoints/Module_14_Woordvorming.pptx
+++ b/neerlandais1/powerpoints/Module_14_Woordvorming.pptx
@@ -133,19 +133,19 @@
   <p:extLst>
     <p:ext uri="{521415D9-36F7-43E2-AB2F-B90AF26B5E84}">
       <p14:sectionLst xmlns:p14="http://schemas.microsoft.com/office/powerpoint/2010/main">
-        <p14:section name="Ouverture" id="{9aea3e4d-c05f-d533-1b26-fe7abc4507ce}">
+        <p14:section name="Ouverture" id="{f35b93fc-5f2d-44cc-a4d7-d73d501852f0}">
           <p14:sldIdLst>
             <p14:sldId id="256"/>
           </p14:sldIdLst>
         </p14:section>
-        <p14:section name="Découvrir" id="{79aceecd-a21c-49e1-25d7-2ce9cb541c9e}">
+        <p14:section name="Découvrir" id="{10f06e4e-a839-4094-1214-a3352a147200}">
           <p14:sldIdLst>
             <p14:sldId id="257"/>
             <p14:sldId id="258"/>
             <p14:sldId id="259"/>
           </p14:sldIdLst>
         </p14:section>
-        <p14:section name="Comprendre" id="{e5113a3e-94c8-d718-c544-12ea324c4ad2}">
+        <p14:section name="Comprendre" id="{b9672143-7044-39e7-d330-74dff5270290}">
           <p14:sldIdLst>
             <p14:sldId id="260"/>
             <p14:sldId id="261"/>
@@ -159,7 +159,7 @@
             <p14:sldId id="269"/>
           </p14:sldIdLst>
         </p14:section>
-        <p14:section name="JIJ NU ! — Oefeningen" id="{54c8f46b-8c2f-df49-fff6-bf64d66ef007}">
+        <p14:section name="JIJ NU ! — Oefeningen" id="{8b850c5f-2563-e505-c763-487415b900da}">
           <p14:sldIdLst>
             <p14:sldId id="270"/>
             <p14:sldId id="271"/>
@@ -175,7 +175,7 @@
             <p14:sldId id="281"/>
           </p14:sldIdLst>
         </p14:section>
-        <p14:section name="Clôture" id="{28e4a441-8680-0804-b9b4-f55cac24fe68}">
+        <p14:section name="Clôture" id="{69060052-96aa-31b1-221a-0bf0960868a7}">
           <p14:sldIdLst>
             <p14:sldId id="282"/>
           </p14:sldIdLst>
@@ -3806,7 +3806,7 @@
                   <a:srgbClr val="FFFFFF"/>
                 </a:solidFill>
               </a:rPr>
-              <a:t>MODULE 14 / 29</a:t>
+              <a:t>MODULE 14 / 32</a:t>
             </a:r>
             <a:endParaRPr lang="en-US" sz="1400" dirty="0"/>
           </a:p>

--- a/neerlandais1/powerpoints/Module_14_Woordvorming.pptx
+++ b/neerlandais1/powerpoints/Module_14_Woordvorming.pptx
@@ -133,19 +133,19 @@
   <p:extLst>
     <p:ext uri="{521415D9-36F7-43E2-AB2F-B90AF26B5E84}">
       <p14:sectionLst xmlns:p14="http://schemas.microsoft.com/office/powerpoint/2010/main">
-        <p14:section name="Ouverture" id="{f35b93fc-5f2d-44cc-a4d7-d73d501852f0}">
+        <p14:section name="Ouverture" id="{5f146719-38f0-b729-d9de-734d7b0f1983}">
           <p14:sldIdLst>
             <p14:sldId id="256"/>
           </p14:sldIdLst>
         </p14:section>
-        <p14:section name="Découvrir" id="{10f06e4e-a839-4094-1214-a3352a147200}">
+        <p14:section name="Découvrir" id="{7fbb601a-e498-47b2-acbf-4d2f8f7a4082}">
           <p14:sldIdLst>
             <p14:sldId id="257"/>
             <p14:sldId id="258"/>
             <p14:sldId id="259"/>
           </p14:sldIdLst>
         </p14:section>
-        <p14:section name="Comprendre" id="{b9672143-7044-39e7-d330-74dff5270290}">
+        <p14:section name="Comprendre" id="{3444de93-18cf-abb4-022e-ed87521076f8}">
           <p14:sldIdLst>
             <p14:sldId id="260"/>
             <p14:sldId id="261"/>
@@ -159,7 +159,7 @@
             <p14:sldId id="269"/>
           </p14:sldIdLst>
         </p14:section>
-        <p14:section name="JIJ NU ! — Oefeningen" id="{8b850c5f-2563-e505-c763-487415b900da}">
+        <p14:section name="JIJ NU ! — Oefeningen" id="{deb15a02-0424-8023-cc90-3389093b7881}">
           <p14:sldIdLst>
             <p14:sldId id="270"/>
             <p14:sldId id="271"/>
@@ -175,7 +175,7 @@
             <p14:sldId id="281"/>
           </p14:sldIdLst>
         </p14:section>
-        <p14:section name="Clôture" id="{69060052-96aa-31b1-221a-0bf0960868a7}">
+        <p14:section name="Clôture" id="{dbc07827-1e29-e1e7-f10b-592355e1c976}">
           <p14:sldIdLst>
             <p14:sldId id="282"/>
           </p14:sldIdLst>

--- a/neerlandais1/powerpoints/Module_14_Woordvorming.pptx
+++ b/neerlandais1/powerpoints/Module_14_Woordvorming.pptx
@@ -133,19 +133,19 @@
   <p:extLst>
     <p:ext uri="{521415D9-36F7-43E2-AB2F-B90AF26B5E84}">
       <p14:sectionLst xmlns:p14="http://schemas.microsoft.com/office/powerpoint/2010/main">
-        <p14:section name="Ouverture" id="{5f146719-38f0-b729-d9de-734d7b0f1983}">
+        <p14:section name="Ouverture" id="{2cc9219a-7536-d5bf-8993-2b0cff1f1807}">
           <p14:sldIdLst>
             <p14:sldId id="256"/>
           </p14:sldIdLst>
         </p14:section>
-        <p14:section name="Découvrir" id="{7fbb601a-e498-47b2-acbf-4d2f8f7a4082}">
+        <p14:section name="Découvrir" id="{8f0b0866-a632-b55d-45e3-e06a11815488}">
           <p14:sldIdLst>
             <p14:sldId id="257"/>
             <p14:sldId id="258"/>
             <p14:sldId id="259"/>
           </p14:sldIdLst>
         </p14:section>
-        <p14:section name="Comprendre" id="{3444de93-18cf-abb4-022e-ed87521076f8}">
+        <p14:section name="Comprendre" id="{3da3c0fc-5a7e-f6d7-eaf4-eb49447a6db2}">
           <p14:sldIdLst>
             <p14:sldId id="260"/>
             <p14:sldId id="261"/>
@@ -159,7 +159,7 @@
             <p14:sldId id="269"/>
           </p14:sldIdLst>
         </p14:section>
-        <p14:section name="JIJ NU ! — Oefeningen" id="{deb15a02-0424-8023-cc90-3389093b7881}">
+        <p14:section name="JIJ NU ! — Oefeningen" id="{4fb3ab9d-438a-4fd0-5e4d-4ada698afff4}">
           <p14:sldIdLst>
             <p14:sldId id="270"/>
             <p14:sldId id="271"/>
@@ -175,7 +175,7 @@
             <p14:sldId id="281"/>
           </p14:sldIdLst>
         </p14:section>
-        <p14:section name="Clôture" id="{dbc07827-1e29-e1e7-f10b-592355e1c976}">
+        <p14:section name="Clôture" id="{2c52b8ec-0961-dfd1-976f-9d7a49d288d1}">
           <p14:sldIdLst>
             <p14:sldId id="282"/>
           </p14:sldIdLst>

--- a/neerlandais1/powerpoints/Module_14_Woordvorming.pptx
+++ b/neerlandais1/powerpoints/Module_14_Woordvorming.pptx
@@ -133,19 +133,19 @@
   <p:extLst>
     <p:ext uri="{521415D9-36F7-43E2-AB2F-B90AF26B5E84}">
       <p14:sectionLst xmlns:p14="http://schemas.microsoft.com/office/powerpoint/2010/main">
-        <p14:section name="Ouverture" id="{2cc9219a-7536-d5bf-8993-2b0cff1f1807}">
+        <p14:section name="Ouverture" id="{090b00b2-da47-0c3f-347e-a3c4566dbd34}">
           <p14:sldIdLst>
             <p14:sldId id="256"/>
           </p14:sldIdLst>
         </p14:section>
-        <p14:section name="Découvrir" id="{8f0b0866-a632-b55d-45e3-e06a11815488}">
+        <p14:section name="Découvrir" id="{3c97e085-b36d-fd0a-345f-9280b3447c90}">
           <p14:sldIdLst>
             <p14:sldId id="257"/>
             <p14:sldId id="258"/>
             <p14:sldId id="259"/>
           </p14:sldIdLst>
         </p14:section>
-        <p14:section name="Comprendre" id="{3da3c0fc-5a7e-f6d7-eaf4-eb49447a6db2}">
+        <p14:section name="Comprendre" id="{f60f13a6-fb19-1859-432c-54cfc5432d0d}">
           <p14:sldIdLst>
             <p14:sldId id="260"/>
             <p14:sldId id="261"/>
@@ -159,7 +159,7 @@
             <p14:sldId id="269"/>
           </p14:sldIdLst>
         </p14:section>
-        <p14:section name="JIJ NU ! — Oefeningen" id="{4fb3ab9d-438a-4fd0-5e4d-4ada698afff4}">
+        <p14:section name="JIJ NU ! — Oefeningen" id="{8270590c-ac36-6729-1e6d-653cb1eaacab}">
           <p14:sldIdLst>
             <p14:sldId id="270"/>
             <p14:sldId id="271"/>
@@ -175,7 +175,7 @@
             <p14:sldId id="281"/>
           </p14:sldIdLst>
         </p14:section>
-        <p14:section name="Clôture" id="{2c52b8ec-0961-dfd1-976f-9d7a49d288d1}">
+        <p14:section name="Clôture" id="{ad8f9c85-711c-f936-f5ba-afeb9a6470a4}">
           <p14:sldIdLst>
             <p14:sldId id="282"/>
           </p14:sldIdLst>

--- a/neerlandais1/powerpoints/Module_14_Woordvorming.pptx
+++ b/neerlandais1/powerpoints/Module_14_Woordvorming.pptx
@@ -133,19 +133,19 @@
   <p:extLst>
     <p:ext uri="{521415D9-36F7-43E2-AB2F-B90AF26B5E84}">
       <p14:sectionLst xmlns:p14="http://schemas.microsoft.com/office/powerpoint/2010/main">
-        <p14:section name="Ouverture" id="{090b00b2-da47-0c3f-347e-a3c4566dbd34}">
+        <p14:section name="Ouverture" id="{96beed0f-aaef-59fa-f3d1-41455c9c6721}">
           <p14:sldIdLst>
             <p14:sldId id="256"/>
           </p14:sldIdLst>
         </p14:section>
-        <p14:section name="Découvrir" id="{3c97e085-b36d-fd0a-345f-9280b3447c90}">
+        <p14:section name="Découvrir" id="{8b086f4b-02a9-963d-c107-0f58f1e91f42}">
           <p14:sldIdLst>
             <p14:sldId id="257"/>
             <p14:sldId id="258"/>
             <p14:sldId id="259"/>
           </p14:sldIdLst>
         </p14:section>
-        <p14:section name="Comprendre" id="{f60f13a6-fb19-1859-432c-54cfc5432d0d}">
+        <p14:section name="Comprendre" id="{9d056a6e-7cd6-0460-5a5b-907f54567796}">
           <p14:sldIdLst>
             <p14:sldId id="260"/>
             <p14:sldId id="261"/>
@@ -159,7 +159,7 @@
             <p14:sldId id="269"/>
           </p14:sldIdLst>
         </p14:section>
-        <p14:section name="JIJ NU ! — Oefeningen" id="{8270590c-ac36-6729-1e6d-653cb1eaacab}">
+        <p14:section name="JIJ NU ! — Oefeningen" id="{f561860f-ef82-db4c-5fec-d0d02317444c}">
           <p14:sldIdLst>
             <p14:sldId id="270"/>
             <p14:sldId id="271"/>
@@ -175,7 +175,7 @@
             <p14:sldId id="281"/>
           </p14:sldIdLst>
         </p14:section>
-        <p14:section name="Clôture" id="{ad8f9c85-711c-f936-f5ba-afeb9a6470a4}">
+        <p14:section name="Clôture" id="{269796e6-b97c-c6b5-d2f2-c533b8522c9b}">
           <p14:sldIdLst>
             <p14:sldId id="282"/>
           </p14:sldIdLst>

--- a/neerlandais1/powerpoints/Module_14_Woordvorming.pptx
+++ b/neerlandais1/powerpoints/Module_14_Woordvorming.pptx
@@ -133,19 +133,19 @@
   <p:extLst>
     <p:ext uri="{521415D9-36F7-43E2-AB2F-B90AF26B5E84}">
       <p14:sectionLst xmlns:p14="http://schemas.microsoft.com/office/powerpoint/2010/main">
-        <p14:section name="Ouverture" id="{96beed0f-aaef-59fa-f3d1-41455c9c6721}">
+        <p14:section name="Ouverture" id="{5bf06eab-eef6-2b0b-0610-8efc907bcc31}">
           <p14:sldIdLst>
             <p14:sldId id="256"/>
           </p14:sldIdLst>
         </p14:section>
-        <p14:section name="Découvrir" id="{8b086f4b-02a9-963d-c107-0f58f1e91f42}">
+        <p14:section name="Découvrir" id="{f1ebffbc-ce5a-1a74-051c-27845e2f3c04}">
           <p14:sldIdLst>
             <p14:sldId id="257"/>
             <p14:sldId id="258"/>
             <p14:sldId id="259"/>
           </p14:sldIdLst>
         </p14:section>
-        <p14:section name="Comprendre" id="{9d056a6e-7cd6-0460-5a5b-907f54567796}">
+        <p14:section name="Comprendre" id="{b817da5e-6cb7-6e5e-e757-2de2ebbe0bb5}">
           <p14:sldIdLst>
             <p14:sldId id="260"/>
             <p14:sldId id="261"/>
@@ -159,7 +159,7 @@
             <p14:sldId id="269"/>
           </p14:sldIdLst>
         </p14:section>
-        <p14:section name="JIJ NU ! — Oefeningen" id="{f561860f-ef82-db4c-5fec-d0d02317444c}">
+        <p14:section name="JIJ NU ! — Oefeningen" id="{ae87ad2e-2a25-84d7-34e8-19517b83303f}">
           <p14:sldIdLst>
             <p14:sldId id="270"/>
             <p14:sldId id="271"/>
@@ -175,7 +175,7 @@
             <p14:sldId id="281"/>
           </p14:sldIdLst>
         </p14:section>
-        <p14:section name="Clôture" id="{269796e6-b97c-c6b5-d2f2-c533b8522c9b}">
+        <p14:section name="Clôture" id="{d43b46db-e718-e3f3-1df0-659aaab54d0b}">
           <p14:sldIdLst>
             <p14:sldId id="282"/>
           </p14:sldIdLst>

--- a/neerlandais1/powerpoints/Module_14_Woordvorming.pptx
+++ b/neerlandais1/powerpoints/Module_14_Woordvorming.pptx
@@ -133,19 +133,19 @@
   <p:extLst>
     <p:ext uri="{521415D9-36F7-43E2-AB2F-B90AF26B5E84}">
       <p14:sectionLst xmlns:p14="http://schemas.microsoft.com/office/powerpoint/2010/main">
-        <p14:section name="Ouverture" id="{5bf06eab-eef6-2b0b-0610-8efc907bcc31}">
+        <p14:section name="Ouverture" id="{f8639714-0c22-b626-bf96-4d0a2943b216}">
           <p14:sldIdLst>
             <p14:sldId id="256"/>
           </p14:sldIdLst>
         </p14:section>
-        <p14:section name="Découvrir" id="{f1ebffbc-ce5a-1a74-051c-27845e2f3c04}">
+        <p14:section name="Découvrir" id="{4010b420-38da-585d-b08a-08ff6fa52788}">
           <p14:sldIdLst>
             <p14:sldId id="257"/>
             <p14:sldId id="258"/>
             <p14:sldId id="259"/>
           </p14:sldIdLst>
         </p14:section>
-        <p14:section name="Comprendre" id="{b817da5e-6cb7-6e5e-e757-2de2ebbe0bb5}">
+        <p14:section name="Comprendre" id="{5e5ea25f-c0f9-3c82-28a5-1f72235f8534}">
           <p14:sldIdLst>
             <p14:sldId id="260"/>
             <p14:sldId id="261"/>
@@ -159,7 +159,7 @@
             <p14:sldId id="269"/>
           </p14:sldIdLst>
         </p14:section>
-        <p14:section name="JIJ NU ! — Oefeningen" id="{ae87ad2e-2a25-84d7-34e8-19517b83303f}">
+        <p14:section name="JIJ NU ! — Oefeningen" id="{c0aaa306-2ba6-c0c1-bcc7-0414bdc46098}">
           <p14:sldIdLst>
             <p14:sldId id="270"/>
             <p14:sldId id="271"/>
@@ -175,7 +175,7 @@
             <p14:sldId id="281"/>
           </p14:sldIdLst>
         </p14:section>
-        <p14:section name="Clôture" id="{d43b46db-e718-e3f3-1df0-659aaab54d0b}">
+        <p14:section name="Clôture" id="{1558b969-72f1-04af-9d93-c3e2dbf9a99b}">
           <p14:sldIdLst>
             <p14:sldId id="282"/>
           </p14:sldIdLst>

--- a/neerlandais1/powerpoints/Module_14_Woordvorming.pptx
+++ b/neerlandais1/powerpoints/Module_14_Woordvorming.pptx
@@ -133,19 +133,19 @@
   <p:extLst>
     <p:ext uri="{521415D9-36F7-43E2-AB2F-B90AF26B5E84}">
       <p14:sectionLst xmlns:p14="http://schemas.microsoft.com/office/powerpoint/2010/main">
-        <p14:section name="Ouverture" id="{f8639714-0c22-b626-bf96-4d0a2943b216}">
+        <p14:section name="Ouverture" id="{7ef35815-a12e-876f-47e9-e9e91f841a57}">
           <p14:sldIdLst>
             <p14:sldId id="256"/>
           </p14:sldIdLst>
         </p14:section>
-        <p14:section name="Découvrir" id="{4010b420-38da-585d-b08a-08ff6fa52788}">
+        <p14:section name="Découvrir" id="{5ed8860e-06a7-b0ca-11e3-a490c01308d9}">
           <p14:sldIdLst>
             <p14:sldId id="257"/>
             <p14:sldId id="258"/>
             <p14:sldId id="259"/>
           </p14:sldIdLst>
         </p14:section>
-        <p14:section name="Comprendre" id="{5e5ea25f-c0f9-3c82-28a5-1f72235f8534}">
+        <p14:section name="Comprendre" id="{119005bd-cbb0-1601-9ac5-525cfbb46e2a}">
           <p14:sldIdLst>
             <p14:sldId id="260"/>
             <p14:sldId id="261"/>
@@ -159,7 +159,7 @@
             <p14:sldId id="269"/>
           </p14:sldIdLst>
         </p14:section>
-        <p14:section name="JIJ NU ! — Oefeningen" id="{c0aaa306-2ba6-c0c1-bcc7-0414bdc46098}">
+        <p14:section name="JIJ NU ! — Oefeningen" id="{cee61e7d-7fc5-f758-4768-21b7b90d48b3}">
           <p14:sldIdLst>
             <p14:sldId id="270"/>
             <p14:sldId id="271"/>
@@ -175,7 +175,7 @@
             <p14:sldId id="281"/>
           </p14:sldIdLst>
         </p14:section>
-        <p14:section name="Clôture" id="{1558b969-72f1-04af-9d93-c3e2dbf9a99b}">
+        <p14:section name="Clôture" id="{95a715d0-f15c-2586-4271-fd2fe02862be}">
           <p14:sldIdLst>
             <p14:sldId id="282"/>
           </p14:sldIdLst>

--- a/neerlandais1/powerpoints/Module_14_Woordvorming.pptx
+++ b/neerlandais1/powerpoints/Module_14_Woordvorming.pptx
@@ -133,19 +133,19 @@
   <p:extLst>
     <p:ext uri="{521415D9-36F7-43E2-AB2F-B90AF26B5E84}">
       <p14:sectionLst xmlns:p14="http://schemas.microsoft.com/office/powerpoint/2010/main">
-        <p14:section name="Ouverture" id="{7ef35815-a12e-876f-47e9-e9e91f841a57}">
+        <p14:section name="Ouverture" id="{ec383ccb-5f42-a190-3ed6-3978b4e5e267}">
           <p14:sldIdLst>
             <p14:sldId id="256"/>
           </p14:sldIdLst>
         </p14:section>
-        <p14:section name="Découvrir" id="{5ed8860e-06a7-b0ca-11e3-a490c01308d9}">
+        <p14:section name="Découvrir" id="{91dbc2ea-ed3d-24bd-6468-5a6a31aa5c05}">
           <p14:sldIdLst>
             <p14:sldId id="257"/>
             <p14:sldId id="258"/>
             <p14:sldId id="259"/>
           </p14:sldIdLst>
         </p14:section>
-        <p14:section name="Comprendre" id="{119005bd-cbb0-1601-9ac5-525cfbb46e2a}">
+        <p14:section name="Comprendre" id="{952dfc51-b612-1c21-e810-671f1a0eb963}">
           <p14:sldIdLst>
             <p14:sldId id="260"/>
             <p14:sldId id="261"/>
@@ -159,7 +159,7 @@
             <p14:sldId id="269"/>
           </p14:sldIdLst>
         </p14:section>
-        <p14:section name="JIJ NU ! — Oefeningen" id="{cee61e7d-7fc5-f758-4768-21b7b90d48b3}">
+        <p14:section name="JIJ NU ! — Oefeningen" id="{5a44c5bc-4497-fea8-c82f-e7f59151291d}">
           <p14:sldIdLst>
             <p14:sldId id="270"/>
             <p14:sldId id="271"/>
@@ -175,7 +175,7 @@
             <p14:sldId id="281"/>
           </p14:sldIdLst>
         </p14:section>
-        <p14:section name="Clôture" id="{95a715d0-f15c-2586-4271-fd2fe02862be}">
+        <p14:section name="Clôture" id="{fe1ea596-9ac6-9558-bed9-aa34495c2b8b}">
           <p14:sldIdLst>
             <p14:sldId id="282"/>
           </p14:sldIdLst>
